--- a/schools-presentations/B Gymnasiou/B41M7 - Επεξεργασία αριθμητικών δεδομένων.pptx
+++ b/schools-presentations/B Gymnasiou/B41M7 - Επεξεργασία αριθμητικών δεδομένων.pptx
@@ -127,7 +127,7 @@
   <pc:docChgLst>
     <pc:chgData name="Άριστος Αρέστη" userId="813aa191-2d4c-464f-9d05-0a7e494d859f" providerId="ADAL" clId="{49C7B61D-1ACF-4AFF-A04E-A3B433E32474}"/>
     <pc:docChg chg="modSld">
-      <pc:chgData name="Άριστος Αρέστη" userId="813aa191-2d4c-464f-9d05-0a7e494d859f" providerId="ADAL" clId="{49C7B61D-1ACF-4AFF-A04E-A3B433E32474}" dt="2026-09-26T07:04:17.173" v="4" actId="14100"/>
+      <pc:chgData name="Άριστος Αρέστη" userId="813aa191-2d4c-464f-9d05-0a7e494d859f" providerId="ADAL" clId="{49C7B61D-1ACF-4AFF-A04E-A3B433E32474}" dt="2026-09-29T18:00:56.828" v="55" actId="20577"/>
       <pc:docMkLst>
         <pc:docMk/>
       </pc:docMkLst>
@@ -153,6 +153,21 @@
             <ac:picMk id="8" creationId="{00000000-0000-0000-0000-000000000000}"/>
           </ac:picMkLst>
         </pc:picChg>
+      </pc:sldChg>
+      <pc:sldChg chg="modSp mod">
+        <pc:chgData name="Άριστος Αρέστη" userId="813aa191-2d4c-464f-9d05-0a7e494d859f" providerId="ADAL" clId="{49C7B61D-1ACF-4AFF-A04E-A3B433E32474}" dt="2026-09-29T18:00:56.828" v="55" actId="20577"/>
+        <pc:sldMkLst>
+          <pc:docMk/>
+          <pc:sldMk cId="1720723223" sldId="260"/>
+        </pc:sldMkLst>
+        <pc:spChg chg="mod">
+          <ac:chgData name="Άριστος Αρέστη" userId="813aa191-2d4c-464f-9d05-0a7e494d859f" providerId="ADAL" clId="{49C7B61D-1ACF-4AFF-A04E-A3B433E32474}" dt="2026-09-29T18:00:56.828" v="55" actId="20577"/>
+          <ac:spMkLst>
+            <pc:docMk/>
+            <pc:sldMk cId="1720723223" sldId="260"/>
+            <ac:spMk id="2" creationId="{D1F662CB-33B1-4659-9CA3-CE9DB862A1A3}"/>
+          </ac:spMkLst>
+        </pc:spChg>
       </pc:sldChg>
     </pc:docChg>
   </pc:docChgLst>
@@ -1083,7 +1098,7 @@
           <a:lstStyle/>
           <a:p>
             <a:fld id="{EDB99004-FBBF-4BCC-9BC3-88F554ADE514}" type="datetimeFigureOut">
-              <a:t>26-Sep-26</a:t>
+              <a:t>29-Sep-26</a:t>
             </a:fld>
             <a:endParaRPr/>
           </a:p>
@@ -1278,7 +1293,7 @@
           <a:lstStyle/>
           <a:p>
             <a:fld id="{EDB99004-FBBF-4BCC-9BC3-88F554ADE514}" type="datetimeFigureOut">
-              <a:t>26-Sep-26</a:t>
+              <a:t>29-Sep-26</a:t>
             </a:fld>
             <a:endParaRPr/>
           </a:p>
@@ -1483,7 +1498,7 @@
           <a:lstStyle/>
           <a:p>
             <a:fld id="{EDB99004-FBBF-4BCC-9BC3-88F554ADE514}" type="datetimeFigureOut">
-              <a:t>26-Sep-26</a:t>
+              <a:t>29-Sep-26</a:t>
             </a:fld>
             <a:endParaRPr/>
           </a:p>
@@ -1678,7 +1693,7 @@
           <a:lstStyle/>
           <a:p>
             <a:fld id="{EDB99004-FBBF-4BCC-9BC3-88F554ADE514}" type="datetimeFigureOut">
-              <a:t>26-Sep-26</a:t>
+              <a:t>29-Sep-26</a:t>
             </a:fld>
             <a:endParaRPr/>
           </a:p>
@@ -1947,7 +1962,7 @@
           <a:lstStyle/>
           <a:p>
             <a:fld id="{EDB99004-FBBF-4BCC-9BC3-88F554ADE514}" type="datetimeFigureOut">
-              <a:t>26-Sep-26</a:t>
+              <a:t>29-Sep-26</a:t>
             </a:fld>
             <a:endParaRPr/>
           </a:p>
@@ -2214,7 +2229,7 @@
           <a:lstStyle/>
           <a:p>
             <a:fld id="{EDB99004-FBBF-4BCC-9BC3-88F554ADE514}" type="datetimeFigureOut">
-              <a:t>26-Sep-26</a:t>
+              <a:t>29-Sep-26</a:t>
             </a:fld>
             <a:endParaRPr/>
           </a:p>
@@ -2630,7 +2645,7 @@
           <a:lstStyle/>
           <a:p>
             <a:fld id="{EDB99004-FBBF-4BCC-9BC3-88F554ADE514}" type="datetimeFigureOut">
-              <a:t>26-Sep-26</a:t>
+              <a:t>29-Sep-26</a:t>
             </a:fld>
             <a:endParaRPr/>
           </a:p>
@@ -2763,7 +2778,7 @@
           <a:lstStyle/>
           <a:p>
             <a:fld id="{EDB99004-FBBF-4BCC-9BC3-88F554ADE514}" type="datetimeFigureOut">
-              <a:t>26-Sep-26</a:t>
+              <a:t>29-Sep-26</a:t>
             </a:fld>
             <a:endParaRPr/>
           </a:p>
@@ -2869,7 +2884,7 @@
           <a:lstStyle/>
           <a:p>
             <a:fld id="{EDB99004-FBBF-4BCC-9BC3-88F554ADE514}" type="datetimeFigureOut">
-              <a:t>26-Sep-26</a:t>
+              <a:t>29-Sep-26</a:t>
             </a:fld>
             <a:endParaRPr/>
           </a:p>
@@ -3188,7 +3203,7 @@
           <a:lstStyle/>
           <a:p>
             <a:fld id="{EDB99004-FBBF-4BCC-9BC3-88F554ADE514}" type="datetimeFigureOut">
-              <a:t>26-Sep-26</a:t>
+              <a:t>29-Sep-26</a:t>
             </a:fld>
             <a:endParaRPr/>
           </a:p>
@@ -3470,7 +3485,7 @@
           <a:lstStyle/>
           <a:p>
             <a:fld id="{EDB99004-FBBF-4BCC-9BC3-88F554ADE514}" type="datetimeFigureOut">
-              <a:t>26-Sep-26</a:t>
+              <a:t>29-Sep-26</a:t>
             </a:fld>
             <a:endParaRPr/>
           </a:p>
@@ -3709,7 +3724,7 @@
           </a:lstStyle>
           <a:p>
             <a:fld id="{EDB99004-FBBF-4BCC-9BC3-88F554ADE514}" type="datetimeFigureOut">
-              <a:t>26-Sep-26</a:t>
+              <a:t>29-Sep-26</a:t>
             </a:fld>
             <a:endParaRPr/>
           </a:p>
@@ -5830,15 +5845,37 @@
               </a:defRPr>
             </a:pPr>
             <a:r>
-              <a:rPr sz="1950" b="0">
-                <a:solidFill>
-                  <a:srgbClr val="151515"/>
-                </a:solidFill>
-                <a:latin typeface="Arial"/>
-                <a:ea typeface="Arial"/>
-                <a:cs typeface="Arial"/>
-              </a:rPr>
-              <a:t>#DIV/0!  Διαίρεση με μηδέν</a:t>
+              <a:rPr sz="1950" b="0" dirty="0">
+                <a:solidFill>
+                  <a:srgbClr val="151515"/>
+                </a:solidFill>
+                <a:latin typeface="Arial"/>
+                <a:ea typeface="Arial"/>
+                <a:cs typeface="Arial"/>
+              </a:rPr>
+              <a:t>#DIV/0!  </a:t>
+            </a:r>
+            <a:r>
+              <a:rPr sz="1950" b="0" dirty="0" err="1">
+                <a:solidFill>
+                  <a:srgbClr val="151515"/>
+                </a:solidFill>
+                <a:latin typeface="Arial"/>
+                <a:ea typeface="Arial"/>
+                <a:cs typeface="Arial"/>
+              </a:rPr>
+              <a:t>Δι</a:t>
+            </a:r>
+            <a:r>
+              <a:rPr sz="1950" b="0" dirty="0">
+                <a:solidFill>
+                  <a:srgbClr val="151515"/>
+                </a:solidFill>
+                <a:latin typeface="Arial"/>
+                <a:ea typeface="Arial"/>
+                <a:cs typeface="Arial"/>
+              </a:rPr>
+              <a:t>αίρεση με μηδέν</a:t>
             </a:r>
           </a:p>
           <a:p>
@@ -5853,16 +5890,101 @@
               </a:defRPr>
             </a:pPr>
             <a:r>
-              <a:rPr sz="1950" b="0">
-                <a:solidFill>
-                  <a:srgbClr val="151515"/>
-                </a:solidFill>
-                <a:latin typeface="Arial"/>
-                <a:ea typeface="Arial"/>
-                <a:cs typeface="Arial"/>
-              </a:rPr>
-              <a:t>#NAME?  Λάθος όνομα ή χαρακτήρας</a:t>
-            </a:r>
+              <a:rPr sz="1950" b="0" dirty="0">
+                <a:solidFill>
+                  <a:srgbClr val="151515"/>
+                </a:solidFill>
+                <a:latin typeface="Arial"/>
+                <a:ea typeface="Arial"/>
+                <a:cs typeface="Arial"/>
+              </a:rPr>
+              <a:t>#NAME?  </a:t>
+            </a:r>
+            <a:r>
+              <a:rPr sz="1950" b="0" dirty="0" err="1">
+                <a:solidFill>
+                  <a:srgbClr val="151515"/>
+                </a:solidFill>
+                <a:latin typeface="Arial"/>
+                <a:ea typeface="Arial"/>
+                <a:cs typeface="Arial"/>
+              </a:rPr>
+              <a:t>Λάθος</a:t>
+            </a:r>
+            <a:r>
+              <a:rPr sz="1950" b="0" dirty="0">
+                <a:solidFill>
+                  <a:srgbClr val="151515"/>
+                </a:solidFill>
+                <a:latin typeface="Arial"/>
+                <a:ea typeface="Arial"/>
+                <a:cs typeface="Arial"/>
+              </a:rPr>
+              <a:t> </a:t>
+            </a:r>
+            <a:r>
+              <a:rPr sz="1950" b="0" dirty="0" err="1">
+                <a:solidFill>
+                  <a:srgbClr val="151515"/>
+                </a:solidFill>
+                <a:latin typeface="Arial"/>
+                <a:ea typeface="Arial"/>
+                <a:cs typeface="Arial"/>
+              </a:rPr>
+              <a:t>όνομ</a:t>
+            </a:r>
+            <a:r>
+              <a:rPr sz="1950" b="0" dirty="0">
+                <a:solidFill>
+                  <a:srgbClr val="151515"/>
+                </a:solidFill>
+                <a:latin typeface="Arial"/>
+                <a:ea typeface="Arial"/>
+                <a:cs typeface="Arial"/>
+              </a:rPr>
+              <a:t>α ή χαρακτήρας</a:t>
+            </a:r>
+            <a:r>
+              <a:rPr lang="en-US" sz="1950" b="0" dirty="0">
+                <a:solidFill>
+                  <a:srgbClr val="151515"/>
+                </a:solidFill>
+                <a:latin typeface="Arial"/>
+                <a:ea typeface="Arial"/>
+                <a:cs typeface="Arial"/>
+              </a:rPr>
+              <a:t> </a:t>
+            </a:r>
+            <a:r>
+              <a:rPr lang="el-GR" sz="1950" b="0" dirty="0">
+                <a:solidFill>
+                  <a:srgbClr val="151515"/>
+                </a:solidFill>
+                <a:latin typeface="Arial"/>
+                <a:ea typeface="Arial"/>
+                <a:cs typeface="Arial"/>
+              </a:rPr>
+              <a:t>ή όχι </a:t>
+            </a:r>
+            <a:r>
+              <a:rPr lang="el-GR" sz="1950" b="0">
+                <a:solidFill>
+                  <a:srgbClr val="151515"/>
+                </a:solidFill>
+                <a:latin typeface="Arial"/>
+                <a:ea typeface="Arial"/>
+                <a:cs typeface="Arial"/>
+              </a:rPr>
+              <a:t>λατινικοί χαρακτήρες( Θ3 )</a:t>
+            </a:r>
+            <a:endParaRPr sz="1950" b="0">
+              <a:solidFill>
+                <a:srgbClr val="151515"/>
+              </a:solidFill>
+              <a:latin typeface="Arial"/>
+              <a:ea typeface="Arial"/>
+              <a:cs typeface="Arial"/>
+            </a:endParaRPr>
           </a:p>
           <a:p>
             <a:pPr>
@@ -5876,15 +5998,37 @@
               </a:defRPr>
             </a:pPr>
             <a:r>
-              <a:rPr sz="1950" b="0">
-                <a:solidFill>
-                  <a:srgbClr val="151515"/>
-                </a:solidFill>
-                <a:latin typeface="Arial"/>
-                <a:ea typeface="Arial"/>
-                <a:cs typeface="Arial"/>
-              </a:rPr>
-              <a:t>#VALUE!  Ακατάλληλο περιεχόμενο</a:t>
+              <a:rPr sz="1950" b="0" dirty="0">
+                <a:solidFill>
+                  <a:srgbClr val="151515"/>
+                </a:solidFill>
+                <a:latin typeface="Arial"/>
+                <a:ea typeface="Arial"/>
+                <a:cs typeface="Arial"/>
+              </a:rPr>
+              <a:t>#VALUE!  </a:t>
+            </a:r>
+            <a:r>
+              <a:rPr sz="1950" b="0" dirty="0" err="1">
+                <a:solidFill>
+                  <a:srgbClr val="151515"/>
+                </a:solidFill>
+                <a:latin typeface="Arial"/>
+                <a:ea typeface="Arial"/>
+                <a:cs typeface="Arial"/>
+              </a:rPr>
+              <a:t>Ακ</a:t>
+            </a:r>
+            <a:r>
+              <a:rPr sz="1950" b="0" dirty="0">
+                <a:solidFill>
+                  <a:srgbClr val="151515"/>
+                </a:solidFill>
+                <a:latin typeface="Arial"/>
+                <a:ea typeface="Arial"/>
+                <a:cs typeface="Arial"/>
+              </a:rPr>
+              <a:t>ατάλληλο περιεχόμενο</a:t>
             </a:r>
           </a:p>
           <a:p>
@@ -5899,15 +6043,37 @@
               </a:defRPr>
             </a:pPr>
             <a:r>
-              <a:rPr sz="1950" b="0">
-                <a:solidFill>
-                  <a:srgbClr val="151515"/>
-                </a:solidFill>
-                <a:latin typeface="Arial"/>
-                <a:ea typeface="Arial"/>
-                <a:cs typeface="Arial"/>
-              </a:rPr>
-              <a:t>#REF!  Αναφορά σε κελί που διαγράφηκε</a:t>
+              <a:rPr sz="1950" b="0" dirty="0">
+                <a:solidFill>
+                  <a:srgbClr val="151515"/>
+                </a:solidFill>
+                <a:latin typeface="Arial"/>
+                <a:ea typeface="Arial"/>
+                <a:cs typeface="Arial"/>
+              </a:rPr>
+              <a:t>#REF!  </a:t>
+            </a:r>
+            <a:r>
+              <a:rPr sz="1950" b="0" dirty="0" err="1">
+                <a:solidFill>
+                  <a:srgbClr val="151515"/>
+                </a:solidFill>
+                <a:latin typeface="Arial"/>
+                <a:ea typeface="Arial"/>
+                <a:cs typeface="Arial"/>
+              </a:rPr>
+              <a:t>Αν</a:t>
+            </a:r>
+            <a:r>
+              <a:rPr sz="1950" b="0" dirty="0">
+                <a:solidFill>
+                  <a:srgbClr val="151515"/>
+                </a:solidFill>
+                <a:latin typeface="Arial"/>
+                <a:ea typeface="Arial"/>
+                <a:cs typeface="Arial"/>
+              </a:rPr>
+              <a:t>αφορά σε κελί που διαγράφηκε</a:t>
             </a:r>
           </a:p>
         </p:txBody>

--- a/schools-presentations/B Gymnasiou/B41M7 - Επεξεργασία αριθμητικών δεδομένων.pptx
+++ b/schools-presentations/B Gymnasiou/B41M7 - Επεξεργασία αριθμητικών δεδομένων.pptx
@@ -122,12 +122,20 @@
 </p:presentation>
 </file>
 
+<file path=ppt/revisionInfo.xml><?xml version="1.0" encoding="utf-8"?>
+<p1510:revInfo xmlns:a="http://schemas.openxmlformats.org/drawingml/2006/main" xmlns:r="http://schemas.openxmlformats.org/officeDocument/2006/relationships" xmlns:p1510="http://schemas.microsoft.com/office/powerpoint/2015/10/main">
+  <p1510:revLst>
+    <p1510:client id="{61B9A57D-C327-4398-8496-AFA0EDDE0842}" v="1" dt="2026-10-04T13:10:05.708"/>
+  </p1510:revLst>
+</p1510:revInfo>
+</file>
+
 <file path=ppt/changesInfos/changesInfo1.xml><?xml version="1.0" encoding="utf-8"?>
 <pc:chgInfo xmlns:a="http://schemas.openxmlformats.org/drawingml/2006/main" xmlns:r="http://schemas.openxmlformats.org/officeDocument/2006/relationships" xmlns:ac="http://schemas.microsoft.com/office/drawing/2013/main/command" xmlns:pc="http://schemas.microsoft.com/office/powerpoint/2013/main/command">
   <pc:docChgLst>
     <pc:chgData name="Άριστος Αρέστη" userId="813aa191-2d4c-464f-9d05-0a7e494d859f" providerId="ADAL" clId="{49C7B61D-1ACF-4AFF-A04E-A3B433E32474}"/>
-    <pc:docChg chg="modSld">
-      <pc:chgData name="Άριστος Αρέστη" userId="813aa191-2d4c-464f-9d05-0a7e494d859f" providerId="ADAL" clId="{49C7B61D-1ACF-4AFF-A04E-A3B433E32474}" dt="2026-09-29T18:00:56.828" v="55" actId="20577"/>
+    <pc:docChg chg="undo custSel modSld">
+      <pc:chgData name="Άριστος Αρέστη" userId="813aa191-2d4c-464f-9d05-0a7e494d859f" providerId="ADAL" clId="{49C7B61D-1ACF-4AFF-A04E-A3B433E32474}" dt="2026-10-04T13:11:07.522" v="138" actId="1076"/>
       <pc:docMkLst>
         <pc:docMk/>
       </pc:docMkLst>
@@ -154,8 +162,47 @@
           </ac:picMkLst>
         </pc:picChg>
       </pc:sldChg>
+      <pc:sldChg chg="addSp delSp modSp mod">
+        <pc:chgData name="Άριστος Αρέστη" userId="813aa191-2d4c-464f-9d05-0a7e494d859f" providerId="ADAL" clId="{49C7B61D-1ACF-4AFF-A04E-A3B433E32474}" dt="2026-10-04T13:10:36.546" v="134" actId="1076"/>
+        <pc:sldMkLst>
+          <pc:docMk/>
+          <pc:sldMk cId="2484230000" sldId="259"/>
+        </pc:sldMkLst>
+        <pc:spChg chg="mod">
+          <ac:chgData name="Άριστος Αρέστη" userId="813aa191-2d4c-464f-9d05-0a7e494d859f" providerId="ADAL" clId="{49C7B61D-1ACF-4AFF-A04E-A3B433E32474}" dt="2026-10-04T13:09:11.634" v="122" actId="20577"/>
+          <ac:spMkLst>
+            <pc:docMk/>
+            <pc:sldMk cId="2484230000" sldId="259"/>
+            <ac:spMk id="2" creationId="{BBFCA288-4EC5-414D-AEB4-E7BEF6044991}"/>
+          </ac:spMkLst>
+        </pc:spChg>
+        <pc:picChg chg="add mod">
+          <ac:chgData name="Άριστος Αρέστη" userId="813aa191-2d4c-464f-9d05-0a7e494d859f" providerId="ADAL" clId="{49C7B61D-1ACF-4AFF-A04E-A3B433E32474}" dt="2026-10-04T13:10:36.546" v="134" actId="1076"/>
+          <ac:picMkLst>
+            <pc:docMk/>
+            <pc:sldMk cId="2484230000" sldId="259"/>
+            <ac:picMk id="5" creationId="{C2FEC765-3ECB-FD8D-4A25-238CE1087C46}"/>
+          </ac:picMkLst>
+        </pc:picChg>
+        <pc:picChg chg="del">
+          <ac:chgData name="Άριστος Αρέστη" userId="813aa191-2d4c-464f-9d05-0a7e494d859f" providerId="ADAL" clId="{49C7B61D-1ACF-4AFF-A04E-A3B433E32474}" dt="2026-10-04T13:07:39.495" v="56" actId="478"/>
+          <ac:picMkLst>
+            <pc:docMk/>
+            <pc:sldMk cId="2484230000" sldId="259"/>
+            <ac:picMk id="6" creationId="{00000000-0000-0000-0000-000000000000}"/>
+          </ac:picMkLst>
+        </pc:picChg>
+        <pc:picChg chg="add mod">
+          <ac:chgData name="Άριστος Αρέστη" userId="813aa191-2d4c-464f-9d05-0a7e494d859f" providerId="ADAL" clId="{49C7B61D-1ACF-4AFF-A04E-A3B433E32474}" dt="2026-10-04T13:10:30.943" v="132" actId="1076"/>
+          <ac:picMkLst>
+            <pc:docMk/>
+            <pc:sldMk cId="2484230000" sldId="259"/>
+            <ac:picMk id="7" creationId="{DB99230E-41AF-C2AC-F36F-54358171983B}"/>
+          </ac:picMkLst>
+        </pc:picChg>
+      </pc:sldChg>
       <pc:sldChg chg="modSp mod">
-        <pc:chgData name="Άριστος Αρέστη" userId="813aa191-2d4c-464f-9d05-0a7e494d859f" providerId="ADAL" clId="{49C7B61D-1ACF-4AFF-A04E-A3B433E32474}" dt="2026-09-29T18:00:56.828" v="55" actId="20577"/>
+        <pc:chgData name="Άριστος Αρέστη" userId="813aa191-2d4c-464f-9d05-0a7e494d859f" providerId="ADAL" clId="{49C7B61D-1ACF-4AFF-A04E-A3B433E32474}" dt="2026-10-04T13:11:07.522" v="138" actId="1076"/>
         <pc:sldMkLst>
           <pc:docMk/>
           <pc:sldMk cId="1720723223" sldId="260"/>
@@ -166,6 +213,44 @@
             <pc:docMk/>
             <pc:sldMk cId="1720723223" sldId="260"/>
             <ac:spMk id="2" creationId="{D1F662CB-33B1-4659-9CA3-CE9DB862A1A3}"/>
+          </ac:spMkLst>
+        </pc:spChg>
+        <pc:spChg chg="mod">
+          <ac:chgData name="Άριστος Αρέστη" userId="813aa191-2d4c-464f-9d05-0a7e494d859f" providerId="ADAL" clId="{49C7B61D-1ACF-4AFF-A04E-A3B433E32474}" dt="2026-10-04T13:11:07.522" v="138" actId="1076"/>
+          <ac:spMkLst>
+            <pc:docMk/>
+            <pc:sldMk cId="1720723223" sldId="260"/>
+            <ac:spMk id="4" creationId="{50AA72A7-D120-4A4C-8FC6-7C374DCE171A}"/>
+          </ac:spMkLst>
+        </pc:spChg>
+      </pc:sldChg>
+      <pc:sldChg chg="modSp mod">
+        <pc:chgData name="Άριστος Αρέστη" userId="813aa191-2d4c-464f-9d05-0a7e494d859f" providerId="ADAL" clId="{49C7B61D-1ACF-4AFF-A04E-A3B433E32474}" dt="2026-10-04T13:10:05.750" v="124" actId="27636"/>
+        <pc:sldMkLst>
+          <pc:docMk/>
+          <pc:sldMk cId="3815878654" sldId="262"/>
+        </pc:sldMkLst>
+        <pc:spChg chg="mod">
+          <ac:chgData name="Άριστος Αρέστη" userId="813aa191-2d4c-464f-9d05-0a7e494d859f" providerId="ADAL" clId="{49C7B61D-1ACF-4AFF-A04E-A3B433E32474}" dt="2026-10-04T13:10:05.750" v="124" actId="27636"/>
+          <ac:spMkLst>
+            <pc:docMk/>
+            <pc:sldMk cId="3815878654" sldId="262"/>
+            <ac:spMk id="5" creationId="{CCA98429-4714-4060-B1B6-98546C45466D}"/>
+          </ac:spMkLst>
+        </pc:spChg>
+      </pc:sldChg>
+      <pc:sldChg chg="modSp mod">
+        <pc:chgData name="Άριστος Αρέστη" userId="813aa191-2d4c-464f-9d05-0a7e494d859f" providerId="ADAL" clId="{49C7B61D-1ACF-4AFF-A04E-A3B433E32474}" dt="2026-10-04T13:10:05.754" v="125" actId="27636"/>
+        <pc:sldMkLst>
+          <pc:docMk/>
+          <pc:sldMk cId="608684808" sldId="263"/>
+        </pc:sldMkLst>
+        <pc:spChg chg="mod">
+          <ac:chgData name="Άριστος Αρέστη" userId="813aa191-2d4c-464f-9d05-0a7e494d859f" providerId="ADAL" clId="{49C7B61D-1ACF-4AFF-A04E-A3B433E32474}" dt="2026-10-04T13:10:05.754" v="125" actId="27636"/>
+          <ac:spMkLst>
+            <pc:docMk/>
+            <pc:sldMk cId="608684808" sldId="263"/>
+            <ac:spMk id="5" creationId="{321DCD93-9B7A-48EF-BE3F-395F37051529}"/>
           </ac:spMkLst>
         </pc:spChg>
       </pc:sldChg>
@@ -1098,7 +1183,7 @@
           <a:lstStyle/>
           <a:p>
             <a:fld id="{EDB99004-FBBF-4BCC-9BC3-88F554ADE514}" type="datetimeFigureOut">
-              <a:t>29-Sep-26</a:t>
+              <a:t>04-Oct-26</a:t>
             </a:fld>
             <a:endParaRPr/>
           </a:p>
@@ -1293,7 +1378,7 @@
           <a:lstStyle/>
           <a:p>
             <a:fld id="{EDB99004-FBBF-4BCC-9BC3-88F554ADE514}" type="datetimeFigureOut">
-              <a:t>29-Sep-26</a:t>
+              <a:t>04-Oct-26</a:t>
             </a:fld>
             <a:endParaRPr/>
           </a:p>
@@ -1498,7 +1583,7 @@
           <a:lstStyle/>
           <a:p>
             <a:fld id="{EDB99004-FBBF-4BCC-9BC3-88F554ADE514}" type="datetimeFigureOut">
-              <a:t>29-Sep-26</a:t>
+              <a:t>04-Oct-26</a:t>
             </a:fld>
             <a:endParaRPr/>
           </a:p>
@@ -1693,7 +1778,7 @@
           <a:lstStyle/>
           <a:p>
             <a:fld id="{EDB99004-FBBF-4BCC-9BC3-88F554ADE514}" type="datetimeFigureOut">
-              <a:t>29-Sep-26</a:t>
+              <a:t>04-Oct-26</a:t>
             </a:fld>
             <a:endParaRPr/>
           </a:p>
@@ -1962,7 +2047,7 @@
           <a:lstStyle/>
           <a:p>
             <a:fld id="{EDB99004-FBBF-4BCC-9BC3-88F554ADE514}" type="datetimeFigureOut">
-              <a:t>29-Sep-26</a:t>
+              <a:t>04-Oct-26</a:t>
             </a:fld>
             <a:endParaRPr/>
           </a:p>
@@ -2229,7 +2314,7 @@
           <a:lstStyle/>
           <a:p>
             <a:fld id="{EDB99004-FBBF-4BCC-9BC3-88F554ADE514}" type="datetimeFigureOut">
-              <a:t>29-Sep-26</a:t>
+              <a:t>04-Oct-26</a:t>
             </a:fld>
             <a:endParaRPr/>
           </a:p>
@@ -2645,7 +2730,7 @@
           <a:lstStyle/>
           <a:p>
             <a:fld id="{EDB99004-FBBF-4BCC-9BC3-88F554ADE514}" type="datetimeFigureOut">
-              <a:t>29-Sep-26</a:t>
+              <a:t>04-Oct-26</a:t>
             </a:fld>
             <a:endParaRPr/>
           </a:p>
@@ -2778,7 +2863,7 @@
           <a:lstStyle/>
           <a:p>
             <a:fld id="{EDB99004-FBBF-4BCC-9BC3-88F554ADE514}" type="datetimeFigureOut">
-              <a:t>29-Sep-26</a:t>
+              <a:t>04-Oct-26</a:t>
             </a:fld>
             <a:endParaRPr/>
           </a:p>
@@ -2884,7 +2969,7 @@
           <a:lstStyle/>
           <a:p>
             <a:fld id="{EDB99004-FBBF-4BCC-9BC3-88F554ADE514}" type="datetimeFigureOut">
-              <a:t>29-Sep-26</a:t>
+              <a:t>04-Oct-26</a:t>
             </a:fld>
             <a:endParaRPr/>
           </a:p>
@@ -3203,7 +3288,7 @@
           <a:lstStyle/>
           <a:p>
             <a:fld id="{EDB99004-FBBF-4BCC-9BC3-88F554ADE514}" type="datetimeFigureOut">
-              <a:t>29-Sep-26</a:t>
+              <a:t>04-Oct-26</a:t>
             </a:fld>
             <a:endParaRPr/>
           </a:p>
@@ -3485,7 +3570,7 @@
           <a:lstStyle/>
           <a:p>
             <a:fld id="{EDB99004-FBBF-4BCC-9BC3-88F554ADE514}" type="datetimeFigureOut">
-              <a:t>29-Sep-26</a:t>
+              <a:t>04-Oct-26</a:t>
             </a:fld>
             <a:endParaRPr/>
           </a:p>
@@ -3724,7 +3809,7 @@
           </a:lstStyle>
           <a:p>
             <a:fld id="{EDB99004-FBBF-4BCC-9BC3-88F554ADE514}" type="datetimeFigureOut">
-              <a:t>29-Sep-26</a:t>
+              <a:t>04-Oct-26</a:t>
             </a:fld>
             <a:endParaRPr/>
           </a:p>
@@ -5577,15 +5662,147 @@
               </a:defRPr>
             </a:pPr>
             <a:r>
-              <a:rPr sz="1950" b="0">
-                <a:solidFill>
-                  <a:srgbClr val="151515"/>
-                </a:solidFill>
-                <a:latin typeface="Arial"/>
-                <a:ea typeface="Arial"/>
-                <a:cs typeface="Arial"/>
-              </a:rPr>
-              <a:t>1. Επιλέγουμε το κελί με τον τύπο.</a:t>
+              <a:rPr sz="1950" b="0" dirty="0">
+                <a:solidFill>
+                  <a:srgbClr val="151515"/>
+                </a:solidFill>
+                <a:latin typeface="Arial"/>
+                <a:ea typeface="Arial"/>
+                <a:cs typeface="Arial"/>
+              </a:rPr>
+              <a:t>1. Επ</a:t>
+            </a:r>
+            <a:r>
+              <a:rPr sz="1950" b="0" dirty="0" err="1">
+                <a:solidFill>
+                  <a:srgbClr val="151515"/>
+                </a:solidFill>
+                <a:latin typeface="Arial"/>
+                <a:ea typeface="Arial"/>
+                <a:cs typeface="Arial"/>
+              </a:rPr>
+              <a:t>ιλέγουμε</a:t>
+            </a:r>
+            <a:r>
+              <a:rPr sz="1950" b="0" dirty="0">
+                <a:solidFill>
+                  <a:srgbClr val="151515"/>
+                </a:solidFill>
+                <a:latin typeface="Arial"/>
+                <a:ea typeface="Arial"/>
+                <a:cs typeface="Arial"/>
+              </a:rPr>
+              <a:t> </a:t>
+            </a:r>
+            <a:r>
+              <a:rPr sz="1950" b="0" dirty="0" err="1">
+                <a:solidFill>
+                  <a:srgbClr val="151515"/>
+                </a:solidFill>
+                <a:latin typeface="Arial"/>
+                <a:ea typeface="Arial"/>
+                <a:cs typeface="Arial"/>
+              </a:rPr>
+              <a:t>το</a:t>
+            </a:r>
+            <a:r>
+              <a:rPr sz="1950" b="0" dirty="0">
+                <a:solidFill>
+                  <a:srgbClr val="151515"/>
+                </a:solidFill>
+                <a:latin typeface="Arial"/>
+                <a:ea typeface="Arial"/>
+                <a:cs typeface="Arial"/>
+              </a:rPr>
+              <a:t> </a:t>
+            </a:r>
+            <a:r>
+              <a:rPr sz="1950" b="0" dirty="0" err="1">
+                <a:solidFill>
+                  <a:srgbClr val="151515"/>
+                </a:solidFill>
+                <a:latin typeface="Arial"/>
+                <a:ea typeface="Arial"/>
+                <a:cs typeface="Arial"/>
+              </a:rPr>
+              <a:t>κελί</a:t>
+            </a:r>
+            <a:r>
+              <a:rPr sz="1950" b="0" dirty="0">
+                <a:solidFill>
+                  <a:srgbClr val="151515"/>
+                </a:solidFill>
+                <a:latin typeface="Arial"/>
+                <a:ea typeface="Arial"/>
+                <a:cs typeface="Arial"/>
+              </a:rPr>
+              <a:t> </a:t>
+            </a:r>
+            <a:r>
+              <a:rPr sz="1950" b="0" dirty="0" err="1">
+                <a:solidFill>
+                  <a:srgbClr val="151515"/>
+                </a:solidFill>
+                <a:latin typeface="Arial"/>
+                <a:ea typeface="Arial"/>
+                <a:cs typeface="Arial"/>
+              </a:rPr>
+              <a:t>με</a:t>
+            </a:r>
+            <a:r>
+              <a:rPr sz="1950" b="0" dirty="0">
+                <a:solidFill>
+                  <a:srgbClr val="151515"/>
+                </a:solidFill>
+                <a:latin typeface="Arial"/>
+                <a:ea typeface="Arial"/>
+                <a:cs typeface="Arial"/>
+              </a:rPr>
+              <a:t> </a:t>
+            </a:r>
+            <a:r>
+              <a:rPr sz="1950" b="0" dirty="0" err="1">
+                <a:solidFill>
+                  <a:srgbClr val="151515"/>
+                </a:solidFill>
+                <a:latin typeface="Arial"/>
+                <a:ea typeface="Arial"/>
+                <a:cs typeface="Arial"/>
+              </a:rPr>
+              <a:t>τον</a:t>
+            </a:r>
+            <a:r>
+              <a:rPr sz="1950" b="0" dirty="0">
+                <a:solidFill>
+                  <a:srgbClr val="151515"/>
+                </a:solidFill>
+                <a:latin typeface="Arial"/>
+                <a:ea typeface="Arial"/>
+                <a:cs typeface="Arial"/>
+              </a:rPr>
+              <a:t> </a:t>
+            </a:r>
+            <a:r>
+              <a:rPr sz="1950" b="0" dirty="0" err="1">
+                <a:solidFill>
+                  <a:srgbClr val="151515"/>
+                </a:solidFill>
+                <a:latin typeface="Arial"/>
+                <a:ea typeface="Arial"/>
+                <a:cs typeface="Arial"/>
+              </a:rPr>
+              <a:t>τύ</a:t>
+            </a:r>
+            <a:r>
+              <a:rPr sz="1950" b="0" dirty="0">
+                <a:solidFill>
+                  <a:srgbClr val="151515"/>
+                </a:solidFill>
+                <a:latin typeface="Arial"/>
+                <a:ea typeface="Arial"/>
+                <a:cs typeface="Arial"/>
+              </a:rPr>
+              <a:t>πο.</a:t>
             </a:r>
           </a:p>
           <a:p>
@@ -5600,7 +5817,7 @@
               </a:defRPr>
             </a:pPr>
             <a:r>
-              <a:rPr sz="1950" b="0">
+              <a:rPr sz="1950" b="0" dirty="0">
                 <a:solidFill>
                   <a:srgbClr val="151515"/>
                 </a:solidFill>
@@ -5623,15 +5840,103 @@
               </a:defRPr>
             </a:pPr>
             <a:r>
-              <a:rPr sz="1950" b="0">
-                <a:solidFill>
-                  <a:srgbClr val="151515"/>
-                </a:solidFill>
-                <a:latin typeface="Arial"/>
-                <a:ea typeface="Arial"/>
-                <a:cs typeface="Arial"/>
-              </a:rPr>
-              <a:t>3. Επιλέγουμε την περιοχή προορισμού.</a:t>
+              <a:rPr sz="1950" b="0" dirty="0">
+                <a:solidFill>
+                  <a:srgbClr val="151515"/>
+                </a:solidFill>
+                <a:latin typeface="Arial"/>
+                <a:ea typeface="Arial"/>
+                <a:cs typeface="Arial"/>
+              </a:rPr>
+              <a:t>3. Επ</a:t>
+            </a:r>
+            <a:r>
+              <a:rPr sz="1950" b="0" dirty="0" err="1">
+                <a:solidFill>
+                  <a:srgbClr val="151515"/>
+                </a:solidFill>
+                <a:latin typeface="Arial"/>
+                <a:ea typeface="Arial"/>
+                <a:cs typeface="Arial"/>
+              </a:rPr>
+              <a:t>ιλέγουμε</a:t>
+            </a:r>
+            <a:r>
+              <a:rPr sz="1950" b="0" dirty="0">
+                <a:solidFill>
+                  <a:srgbClr val="151515"/>
+                </a:solidFill>
+                <a:latin typeface="Arial"/>
+                <a:ea typeface="Arial"/>
+                <a:cs typeface="Arial"/>
+              </a:rPr>
+              <a:t> </a:t>
+            </a:r>
+            <a:r>
+              <a:rPr sz="1950" b="0" dirty="0" err="1">
+                <a:solidFill>
+                  <a:srgbClr val="151515"/>
+                </a:solidFill>
+                <a:latin typeface="Arial"/>
+                <a:ea typeface="Arial"/>
+                <a:cs typeface="Arial"/>
+              </a:rPr>
+              <a:t>την</a:t>
+            </a:r>
+            <a:r>
+              <a:rPr sz="1950" b="0" dirty="0">
+                <a:solidFill>
+                  <a:srgbClr val="151515"/>
+                </a:solidFill>
+                <a:latin typeface="Arial"/>
+                <a:ea typeface="Arial"/>
+                <a:cs typeface="Arial"/>
+              </a:rPr>
+              <a:t> π</a:t>
+            </a:r>
+            <a:r>
+              <a:rPr sz="1950" b="0" dirty="0" err="1">
+                <a:solidFill>
+                  <a:srgbClr val="151515"/>
+                </a:solidFill>
+                <a:latin typeface="Arial"/>
+                <a:ea typeface="Arial"/>
+                <a:cs typeface="Arial"/>
+              </a:rPr>
+              <a:t>εριοχή</a:t>
+            </a:r>
+            <a:r>
+              <a:rPr sz="1950" b="0" dirty="0">
+                <a:solidFill>
+                  <a:srgbClr val="151515"/>
+                </a:solidFill>
+                <a:latin typeface="Arial"/>
+                <a:ea typeface="Arial"/>
+                <a:cs typeface="Arial"/>
+              </a:rPr>
+              <a:t> π</a:t>
+            </a:r>
+            <a:r>
+              <a:rPr sz="1950" b="0" dirty="0" err="1">
+                <a:solidFill>
+                  <a:srgbClr val="151515"/>
+                </a:solidFill>
+                <a:latin typeface="Arial"/>
+                <a:ea typeface="Arial"/>
+                <a:cs typeface="Arial"/>
+              </a:rPr>
+              <a:t>ροορισμού</a:t>
+            </a:r>
+            <a:r>
+              <a:rPr sz="1950" b="0" dirty="0">
+                <a:solidFill>
+                  <a:srgbClr val="151515"/>
+                </a:solidFill>
+                <a:latin typeface="Arial"/>
+                <a:ea typeface="Arial"/>
+                <a:cs typeface="Arial"/>
+              </a:rPr>
+              <a:t>.</a:t>
             </a:r>
           </a:p>
           <a:p>
@@ -5646,7 +5951,7 @@
               </a:defRPr>
             </a:pPr>
             <a:r>
-              <a:rPr sz="1950" b="0">
+              <a:rPr sz="1950" b="0" dirty="0">
                 <a:solidFill>
                   <a:srgbClr val="151515"/>
                 </a:solidFill>
@@ -5658,7 +5963,7 @@
             </a:r>
           </a:p>
           <a:p>
-            <a:endParaRPr sz="1950" b="0">
+            <a:endParaRPr sz="1950" b="0" dirty="0">
               <a:solidFill>
                 <a:srgbClr val="151515"/>
               </a:solidFill>
@@ -5679,22 +5984,151 @@
               </a:defRPr>
             </a:pPr>
             <a:r>
-              <a:rPr sz="1950" b="0">
-                <a:solidFill>
-                  <a:srgbClr val="151515"/>
-                </a:solidFill>
-                <a:latin typeface="Arial"/>
-                <a:ea typeface="Arial"/>
-                <a:cs typeface="Arial"/>
-              </a:rPr>
-              <a:t>Το Excel προσαρμόζει τις αναφορές των κελιών σε κάθε νέα γραμμή.</a:t>
-            </a:r>
+              <a:rPr sz="1950" b="0" dirty="0" err="1">
+                <a:solidFill>
+                  <a:srgbClr val="151515"/>
+                </a:solidFill>
+                <a:latin typeface="Arial"/>
+                <a:ea typeface="Arial"/>
+                <a:cs typeface="Arial"/>
+              </a:rPr>
+              <a:t>Το</a:t>
+            </a:r>
+            <a:r>
+              <a:rPr sz="1950" b="0" dirty="0">
+                <a:solidFill>
+                  <a:srgbClr val="151515"/>
+                </a:solidFill>
+                <a:latin typeface="Arial"/>
+                <a:ea typeface="Arial"/>
+                <a:cs typeface="Arial"/>
+              </a:rPr>
+              <a:t> Excel π</a:t>
+            </a:r>
+            <a:r>
+              <a:rPr sz="1950" b="0" dirty="0" err="1">
+                <a:solidFill>
+                  <a:srgbClr val="151515"/>
+                </a:solidFill>
+                <a:latin typeface="Arial"/>
+                <a:ea typeface="Arial"/>
+                <a:cs typeface="Arial"/>
+              </a:rPr>
+              <a:t>ροσ</a:t>
+            </a:r>
+            <a:r>
+              <a:rPr sz="1950" b="0" dirty="0">
+                <a:solidFill>
+                  <a:srgbClr val="151515"/>
+                </a:solidFill>
+                <a:latin typeface="Arial"/>
+                <a:ea typeface="Arial"/>
+                <a:cs typeface="Arial"/>
+              </a:rPr>
+              <a:t>αρμόζει τις αναφορές των κελιών σε κάθε νέα γραμμή.</a:t>
+            </a:r>
+            <a:endParaRPr lang="en-US" sz="1950" b="0" dirty="0">
+              <a:solidFill>
+                <a:srgbClr val="151515"/>
+              </a:solidFill>
+              <a:latin typeface="Arial"/>
+              <a:ea typeface="Arial"/>
+              <a:cs typeface="Arial"/>
+            </a:endParaRPr>
+          </a:p>
+          <a:p>
+            <a:pPr>
+              <a:defRPr sz="1950" b="0">
+                <a:solidFill>
+                  <a:srgbClr val="151515"/>
+                </a:solidFill>
+                <a:latin typeface="Arial"/>
+                <a:ea typeface="Arial"/>
+                <a:cs typeface="Arial"/>
+              </a:defRPr>
+            </a:pPr>
+            <a:endParaRPr lang="en-US" sz="1950" dirty="0">
+              <a:solidFill>
+                <a:srgbClr val="151515"/>
+              </a:solidFill>
+              <a:latin typeface="Arial"/>
+              <a:ea typeface="Arial"/>
+              <a:cs typeface="Arial"/>
+            </a:endParaRPr>
+          </a:p>
+          <a:p>
+            <a:pPr>
+              <a:defRPr sz="1950" b="0">
+                <a:solidFill>
+                  <a:srgbClr val="151515"/>
+                </a:solidFill>
+                <a:latin typeface="Arial"/>
+                <a:ea typeface="Arial"/>
+                <a:cs typeface="Arial"/>
+              </a:defRPr>
+            </a:pPr>
+            <a:endParaRPr lang="en-US" sz="1950" b="0" dirty="0">
+              <a:solidFill>
+                <a:srgbClr val="151515"/>
+              </a:solidFill>
+              <a:latin typeface="Arial"/>
+              <a:ea typeface="Arial"/>
+              <a:cs typeface="Arial"/>
+            </a:endParaRPr>
+          </a:p>
+          <a:p>
+            <a:pPr>
+              <a:defRPr sz="1950" b="0">
+                <a:solidFill>
+                  <a:srgbClr val="151515"/>
+                </a:solidFill>
+                <a:latin typeface="Arial"/>
+                <a:ea typeface="Arial"/>
+                <a:cs typeface="Arial"/>
+              </a:defRPr>
+            </a:pPr>
+            <a:r>
+              <a:rPr lang="el-GR" sz="1950" dirty="0">
+                <a:solidFill>
+                  <a:srgbClr val="151515"/>
+                </a:solidFill>
+                <a:latin typeface="Arial"/>
+                <a:ea typeface="Arial"/>
+                <a:cs typeface="Arial"/>
+              </a:rPr>
+              <a:t>Δεύτερος τρόπος αντιγραφής</a:t>
+            </a:r>
+            <a:r>
+              <a:rPr lang="en-GB" sz="1950" dirty="0">
+                <a:solidFill>
+                  <a:srgbClr val="151515"/>
+                </a:solidFill>
+                <a:latin typeface="Arial"/>
+                <a:ea typeface="Arial"/>
+                <a:cs typeface="Arial"/>
+              </a:rPr>
+              <a:t>;;;</a:t>
+            </a:r>
+            <a:endParaRPr sz="1950" b="0" dirty="0">
+              <a:solidFill>
+                <a:srgbClr val="151515"/>
+              </a:solidFill>
+              <a:latin typeface="Arial"/>
+              <a:ea typeface="Arial"/>
+              <a:cs typeface="Arial"/>
+            </a:endParaRPr>
           </a:p>
         </p:txBody>
       </p:sp>
       <p:pic>
         <p:nvPicPr>
-          <p:cNvPr id="6" name="Picture 5"/>
+          <p:cNvPr id="5" name="Picture 4">
+            <a:extLst>
+              <a:ext uri="{FF2B5EF4-FFF2-40B4-BE49-F238E27FC236}">
+                <a16:creationId xmlns:a16="http://schemas.microsoft.com/office/drawing/2014/main" id="{C2FEC765-3ECB-FD8D-4A25-238CE1087C46}"/>
+              </a:ext>
+            </a:extLst>
+          </p:cNvPr>
           <p:cNvPicPr>
             <a:picLocks noChangeAspect="1"/>
           </p:cNvPicPr>
@@ -5702,12 +6136,44 @@
         </p:nvPicPr>
         <p:blipFill>
           <a:blip r:embed="rId3"/>
-          <a:stretch/>
+          <a:stretch>
+            <a:fillRect/>
+          </a:stretch>
         </p:blipFill>
         <p:spPr>
           <a:xfrm>
-            <a:off x="6762750" y="2512219"/>
-            <a:ext cx="4191000" cy="2024062"/>
+            <a:off x="7497694" y="3938992"/>
+            <a:ext cx="2985668" cy="2296668"/>
+          </a:xfrm>
+          <a:prstGeom prst="rect">
+            <a:avLst/>
+          </a:prstGeom>
+        </p:spPr>
+      </p:pic>
+      <p:pic>
+        <p:nvPicPr>
+          <p:cNvPr id="7" name="Picture 6" descr="Child scratching head with question mark on blackboard concept for confusion, brainstorming and choice. Child thinking stock images, royalty-free photos and pictures">
+            <a:extLst>
+              <a:ext uri="{FF2B5EF4-FFF2-40B4-BE49-F238E27FC236}">
+                <a16:creationId xmlns:a16="http://schemas.microsoft.com/office/drawing/2014/main" id="{DB99230E-41AF-C2AC-F36F-54358171983B}"/>
+              </a:ext>
+            </a:extLst>
+          </p:cNvPr>
+          <p:cNvPicPr>
+            <a:picLocks noChangeAspect="1"/>
+          </p:cNvPicPr>
+          <p:nvPr/>
+        </p:nvPicPr>
+        <p:blipFill>
+          <a:blip r:embed="rId4"/>
+          <a:stretch>
+            <a:fillRect/>
+          </a:stretch>
+        </p:blipFill>
+        <p:spPr>
+          <a:xfrm>
+            <a:off x="7428335" y="843581"/>
+            <a:ext cx="3411643" cy="3168563"/>
           </a:xfrm>
           <a:prstGeom prst="rect">
             <a:avLst/>
@@ -6122,6 +6588,39 @@
               </a:defRPr>
             </a:pPr>
             <a:r>
+              <a:rPr sz="1650" b="1" dirty="0" err="1">
+                <a:solidFill>
+                  <a:srgbClr val="D84B00"/>
+                </a:solidFill>
+                <a:latin typeface="Arial"/>
+                <a:ea typeface="Arial"/>
+                <a:cs typeface="Arial"/>
+              </a:rPr>
+              <a:t>Ελέγχουμε</a:t>
+            </a:r>
+            <a:r>
+              <a:rPr sz="1650" b="1" dirty="0">
+                <a:solidFill>
+                  <a:srgbClr val="D84B00"/>
+                </a:solidFill>
+                <a:latin typeface="Arial"/>
+                <a:ea typeface="Arial"/>
+                <a:cs typeface="Arial"/>
+              </a:rPr>
+              <a:t> π</a:t>
+            </a:r>
+            <a:r>
+              <a:rPr sz="1650" b="1" dirty="0" err="1">
+                <a:solidFill>
+                  <a:srgbClr val="D84B00"/>
+                </a:solidFill>
+                <a:latin typeface="Arial"/>
+                <a:ea typeface="Arial"/>
+                <a:cs typeface="Arial"/>
+              </a:rPr>
+              <a:t>ρώτ</a:t>
+            </a:r>
+            <a:r>
               <a:rPr sz="1650" b="1">
                 <a:solidFill>
                   <a:srgbClr val="D84B00"/>
@@ -6130,7 +6629,7 @@
                 <a:ea typeface="Arial"/>
                 <a:cs typeface="Arial"/>
               </a:rPr>
-              <a:t>Ελέγχουμε πρώτα τον τύπο και τις διευθύνσεις των κελιών.</a:t>
+              <a:t>α τον τύπο και τις διευθύνσεις των κελιών.</a:t>
             </a:r>
           </a:p>
         </p:txBody>
@@ -6179,7 +6678,7 @@
               </a:defRPr>
             </a:pPr>
             <a:r>
-              <a:rPr sz="2250" b="1">
+              <a:rPr sz="2250" b="1" dirty="0">
                 <a:solidFill>
                   <a:srgbClr val="D84B00"/>
                 </a:solidFill>
@@ -6202,7 +6701,7 @@
               </a:defRPr>
             </a:pPr>
             <a:r>
-              <a:rPr sz="2250" b="1">
+              <a:rPr sz="2250" b="1" dirty="0">
                 <a:solidFill>
                   <a:srgbClr val="D84B00"/>
                 </a:solidFill>
@@ -6225,7 +6724,7 @@
               </a:defRPr>
             </a:pPr>
             <a:r>
-              <a:rPr sz="2250" b="1">
+              <a:rPr sz="2250" b="1" dirty="0">
                 <a:solidFill>
                   <a:srgbClr val="D84B00"/>
                 </a:solidFill>
@@ -6248,7 +6747,7 @@
               </a:defRPr>
             </a:pPr>
             <a:r>
-              <a:rPr sz="2250" b="1">
+              <a:rPr sz="2250" b="1" dirty="0">
                 <a:solidFill>
                   <a:srgbClr val="D84B00"/>
                 </a:solidFill>
@@ -6560,7 +7059,7 @@
         </p:spPr>
         <p:txBody>
           <a:bodyPr>
-            <a:normAutofit fontScale="92043"/>
+            <a:normAutofit fontScale="99543"/>
           </a:bodyPr>
           <a:lstStyle/>
           <a:p>
@@ -6874,7 +7373,7 @@
         </p:spPr>
         <p:txBody>
           <a:bodyPr>
-            <a:normAutofit fontScale="77907"/>
+            <a:normAutofit fontScale="85407" lnSpcReduction="20000"/>
           </a:bodyPr>
           <a:lstStyle/>
           <a:p>
